--- a/marketing/pitch-deck/geocore_deck_v5.pptx
+++ b/marketing/pitch-deck/geocore_deck_v5.pptx
@@ -4203,7 +4203,7 @@
                 </a:solidFill>
                 <a:latin typeface="IBM Plex Sans"/>
               </a:rPr>
-              <a:t>Компания, ИНН, email для договора, ФИО и email сотрудника</a:t>
+              <a:t>Компания, БИН, email для договора, ФИО и email сотрудника</a:t>
             </a:r>
           </a:p>
         </p:txBody>
